--- a/media/resources/files/Onduktar_Akcha_Bolup_Toloo_menen_Pe21z8k.pptx
+++ b/media/resources/files/Onduktar_Akcha_Bolup_Toloo_menen_Pe21z8k.pptx
@@ -4986,7 +4986,7 @@
           <a:p>
             <a:r>
               <a:rPr lang="ru-RU" dirty="0"/>
-              <a:t>Бул ресурс математикалык ыкманын жандуу демонстрацияларын камсыз кылат.</a:t>
+              <a:t>Бул ресурс ыкманы жандуу көрсөтөт.</a:t>
             </a:r>
           </a:p>
           <a:p>
@@ -5616,7 +5616,7 @@
             </a:r>
             <a:r>
               <a:rPr lang="en-GB" sz="2000" dirty="0"/>
-              <a:t>= 60,360</a:t>
+              <a:t>= 60 360</a:t>
             </a:r>
             <a:r>
               <a:rPr lang="ky-KG" sz="2000" dirty="0"/>
@@ -5661,11 +5661,11 @@
             </a:r>
             <a:r>
               <a:rPr lang="en-GB" sz="2000" dirty="0"/>
-              <a:t> ÷ 18 = 3,940 </a:t>
+              <a:t> ÷ 18 = 3 940 </a:t>
             </a:r>
             <a:r>
               <a:rPr lang="ky-KG" sz="2000" dirty="0"/>
-              <a:t> сом , айсайын!</a:t>
+              <a:t> сом, айсайын!</a:t>
             </a:r>
             <a:endParaRPr lang="en-GB" sz="2000" dirty="0"/>
           </a:p>
@@ -5747,7 +5747,7 @@
             <a:pPr algn="ctr"/>
             <a:r>
               <a:rPr lang="en-GB" sz="2000" dirty="0"/>
-              <a:t>60,360 + 17.5% </a:t>
+              <a:t>60 360 + 17,5% </a:t>
             </a:r>
             <a:r>
               <a:rPr lang="ky-KG" sz="2000" dirty="0"/>
@@ -5863,7 +5863,7 @@
             <a:pPr algn="ctr"/>
             <a:r>
               <a:rPr lang="en-GB" sz="2000" dirty="0"/>
-              <a:t>= 10,563</a:t>
+              <a:t>= 10 563</a:t>
             </a:r>
             <a:r>
               <a:rPr lang="ky-KG" sz="2000" dirty="0"/>
@@ -6699,7 +6699,7 @@
             <a:pPr algn="ctr"/>
             <a:r>
               <a:rPr lang="en-GB" sz="2000" dirty="0"/>
-              <a:t>31,057</a:t>
+              <a:t>31 057</a:t>
             </a:r>
             <a:r>
               <a:rPr lang="ky-KG" sz="2000" dirty="0"/>
@@ -6899,7 +6899,7 @@
             </a:r>
             <a:r>
               <a:rPr lang="en-GB" sz="2800" dirty="0"/>
-              <a:t>31,057</a:t>
+              <a:t>31 057</a:t>
             </a:r>
             <a:r>
               <a:rPr lang="ky-KG" sz="2800" dirty="0"/>
@@ -7832,7 +7832,7 @@
             <a:pPr algn="ctr"/>
             <a:r>
               <a:rPr lang="en-GB" sz="2000" dirty="0"/>
-              <a:t>12.5% </a:t>
+              <a:t>12,5% </a:t>
             </a:r>
             <a:r>
               <a:rPr lang="ky-KG" sz="2000" dirty="0"/>
@@ -9121,7 +9121,7 @@
             </a:r>
             <a:r>
               <a:rPr lang="en-GB" sz="2000" dirty="0"/>
-              <a:t> = 10,668</a:t>
+              <a:t> = 10 668</a:t>
             </a:r>
             <a:r>
               <a:rPr lang="ky-KG" sz="2000" dirty="0"/>
@@ -9141,7 +9141,7 @@
             </a:r>
             <a:r>
               <a:rPr lang="ky-KG" sz="2000" dirty="0"/>
-              <a:t>1,238  сом</a:t>
+              <a:t>1 238  сом</a:t>
             </a:r>
             <a:endParaRPr lang="en-GB" sz="2000" dirty="0"/>
           </a:p>
@@ -9345,7 +9345,7 @@
             </a:r>
             <a:r>
               <a:rPr lang="en-GB" sz="2000" dirty="0"/>
-              <a:t> = 10,668</a:t>
+              <a:t> = 10 668</a:t>
             </a:r>
           </a:p>
         </p:txBody>
@@ -10201,7 +10201,7 @@
             </a:r>
             <a:r>
               <a:rPr lang="ky-KG" sz="2000" dirty="0"/>
-              <a:t> 33,281 сом</a:t>
+              <a:t> 33 281 сом</a:t>
             </a:r>
             <a:endParaRPr lang="en-GB" sz="2000" dirty="0"/>
           </a:p>
@@ -10290,7 +10290,7 @@
             </a:r>
             <a:r>
               <a:rPr lang="ky-KG" sz="2000" dirty="0"/>
-              <a:t>39,936 </a:t>
+              <a:t>39 936 </a:t>
             </a:r>
             <a:r>
               <a:rPr lang="en-GB" sz="2000" dirty="0"/>
@@ -10298,11 +10298,11 @@
             </a:r>
             <a:r>
               <a:rPr lang="ky-KG" sz="2000" dirty="0"/>
-              <a:t>33,281 </a:t>
+              <a:t>33 281 </a:t>
             </a:r>
             <a:r>
               <a:rPr lang="en-GB" sz="2000" dirty="0"/>
-              <a:t> = 6,655</a:t>
+              <a:t> = 6 655</a:t>
             </a:r>
             <a:r>
               <a:rPr lang="ky-KG" sz="2000" dirty="0"/>
@@ -10484,7 +10484,7 @@
             </a:r>
             <a:r>
               <a:rPr lang="ky-KG" sz="2000" dirty="0"/>
-              <a:t> 39,936</a:t>
+              <a:t> 39 936</a:t>
             </a:r>
             <a:endParaRPr lang="en-GB" sz="2000" dirty="0"/>
           </a:p>
@@ -11345,7 +11345,7 @@
             </a:r>
             <a:r>
               <a:rPr lang="en-GB" sz="2000" dirty="0"/>
-              <a:t> = 89,950 </a:t>
+              <a:t> = 89 950 </a:t>
             </a:r>
             <a:r>
               <a:rPr lang="ky-KG" sz="2000" dirty="0"/>
@@ -11434,7 +11434,7 @@
             </a:r>
             <a:r>
               <a:rPr lang="en-GB" sz="2000" dirty="0"/>
-              <a:t> = 99,900 – 89,950</a:t>
+              <a:t> = 99 900 – 89 950</a:t>
             </a:r>
             <a:r>
               <a:rPr lang="ky-KG" sz="2000" dirty="0"/>
@@ -11442,7 +11442,7 @@
             </a:r>
             <a:r>
               <a:rPr lang="en-GB" sz="2000" dirty="0"/>
-              <a:t>= 9,950 </a:t>
+              <a:t>= 9 950 </a:t>
             </a:r>
             <a:r>
               <a:rPr lang="ky-KG" sz="2000" dirty="0"/>
@@ -11619,7 +11619,7 @@
             </a:r>
             <a:r>
               <a:rPr lang="en-GB" sz="2000" dirty="0"/>
-              <a:t> = 99,900 </a:t>
+              <a:t> = 99 900 </a:t>
             </a:r>
             <a:r>
               <a:rPr lang="ky-KG" sz="2000" dirty="0"/>
@@ -16068,7 +16068,7 @@
             </a:r>
             <a:r>
               <a:rPr lang="en-GB" sz="2400" dirty="0"/>
-              <a:t>= 45,542</a:t>
+              <a:t>= 45 542</a:t>
             </a:r>
             <a:r>
               <a:rPr lang="ky-KG" sz="2400" dirty="0"/>
@@ -19741,7 +19741,7 @@
             <a:pPr algn="ctr"/>
             <a:r>
               <a:rPr lang="ru-RU" sz="2000" dirty="0"/>
-              <a:t>Айдай &amp; Tимур окшош компьютерди сатып алышат.</a:t>
+              <a:t>Айдай &amp; Тимур окшош компьютерди сатып алышат.</a:t>
             </a:r>
             <a:endParaRPr lang="en-GB" sz="2000" dirty="0"/>
           </a:p>
@@ -19789,7 +19789,7 @@
             <a:pPr algn="ctr"/>
             <a:r>
               <a:rPr lang="en-GB" sz="2000" dirty="0"/>
-              <a:t>T</a:t>
+              <a:t>Т</a:t>
             </a:r>
             <a:r>
               <a:rPr lang="ky-KG" sz="2000" dirty="0"/>
@@ -20291,7 +20291,7 @@
             <a:pPr algn="ctr"/>
             <a:r>
               <a:rPr lang="en-GB" sz="2000" dirty="0"/>
-              <a:t>= 57,655</a:t>
+              <a:t>= 57 655</a:t>
             </a:r>
           </a:p>
         </p:txBody>
@@ -23558,7 +23558,7 @@
             </a:r>
             <a:r>
               <a:rPr lang="en-GB" sz="2000" dirty="0"/>
-              <a:t>= 48,285</a:t>
+              <a:t>= 48 285</a:t>
             </a:r>
             <a:r>
               <a:rPr lang="ky-KG" sz="2000" dirty="0"/>
@@ -23978,7 +23978,7 @@
             </a:r>
             <a:r>
               <a:rPr lang="en-GB" sz="2000" dirty="0"/>
-              <a:t> = 73,255</a:t>
+              <a:t> = 73 255</a:t>
             </a:r>
             <a:r>
               <a:rPr lang="ky-KG" sz="2000" dirty="0"/>
@@ -24204,7 +24204,7 @@
             <a:pPr algn="ctr"/>
             <a:r>
               <a:rPr lang="en-GB" sz="2000" dirty="0"/>
-              <a:t>73,255 </a:t>
+              <a:t>73 255 </a:t>
             </a:r>
             <a:r>
               <a:rPr lang="ky-KG" sz="2000" dirty="0"/>
@@ -24273,7 +24273,7 @@
             </a:r>
             <a:r>
               <a:rPr lang="en-GB" sz="2000" dirty="0"/>
-              <a:t>= 48,400</a:t>
+              <a:t>= 48 400</a:t>
             </a:r>
             <a:r>
               <a:rPr lang="ky-KG" sz="2000" dirty="0"/>
@@ -25243,7 +25243,7 @@
             </a:r>
             <a:r>
               <a:rPr lang="en-GB" sz="2000" dirty="0"/>
-              <a:t> = 33,000</a:t>
+              <a:t> = 33 000</a:t>
             </a:r>
             <a:r>
               <a:rPr lang="ky-KG" sz="2000" dirty="0"/>
@@ -25288,11 +25288,11 @@
             </a:r>
             <a:r>
               <a:rPr lang="en-GB" sz="2000" dirty="0"/>
-              <a:t> ÷ 12 = 2,750 </a:t>
+              <a:t> ÷ 12 = 2 750 </a:t>
             </a:r>
             <a:r>
               <a:rPr lang="ky-KG" sz="2000" dirty="0"/>
-              <a:t> сом ,айына</a:t>
+              <a:t> сом,айына</a:t>
             </a:r>
             <a:endParaRPr lang="en-GB" sz="2000" dirty="0"/>
           </a:p>
@@ -26004,7 +26004,7 @@
             </a:r>
             <a:r>
               <a:rPr lang="en-GB" sz="2000" dirty="0"/>
-              <a:t> = 38,822 </a:t>
+              <a:t> = 38 822 </a:t>
             </a:r>
             <a:r>
               <a:rPr lang="ky-KG" sz="2000" dirty="0"/>
@@ -26045,7 +26045,7 @@
             <a:pPr algn="ctr"/>
             <a:r>
               <a:rPr lang="en-GB" sz="2000" dirty="0"/>
-              <a:t>38,822 ÷ 24 = </a:t>
+              <a:t>38 822 ÷ 24 = </a:t>
             </a:r>
             <a:r>
               <a:rPr lang="ky-KG" sz="2000" dirty="0"/>
@@ -26867,11 +26867,11 @@
             <a:pPr algn="ctr"/>
             <a:r>
               <a:rPr lang="en-GB" sz="2000" dirty="0"/>
-              <a:t>51,052.91 ÷ 24 = 2,127 </a:t>
+              <a:t>51 052,91 ÷ 24 = 2 127 </a:t>
             </a:r>
             <a:r>
               <a:rPr lang="ky-KG" sz="2000" dirty="0"/>
-              <a:t> сом , айсайын </a:t>
+              <a:t> сом, айсайын </a:t>
             </a:r>
             <a:endParaRPr lang="en-GB" sz="2000" dirty="0"/>
           </a:p>
@@ -26983,7 +26983,7 @@
             <a:pPr algn="ctr"/>
             <a:r>
               <a:rPr lang="en-GB" sz="2000" dirty="0"/>
-              <a:t>47,713 + 7% </a:t>
+              <a:t>47 713 + 7% </a:t>
             </a:r>
             <a:r>
               <a:rPr lang="ky-KG" sz="2000" dirty="0"/>
@@ -26991,7 +26991,7 @@
             </a:r>
             <a:r>
               <a:rPr lang="en-GB" sz="2000" dirty="0"/>
-              <a:t>= 51,052.91</a:t>
+              <a:t>= 51 052,91</a:t>
             </a:r>
             <a:r>
               <a:rPr lang="ky-KG" sz="2000" dirty="0"/>

--- a/media/resources/files/Onduktar_Akcha_Bolup_Toloo_menen_Pe21z8k.pptx
+++ b/media/resources/files/Onduktar_Akcha_Bolup_Toloo_menen_Pe21z8k.pptx
@@ -5362,7 +5362,7 @@
             <a:pPr algn="ctr"/>
             <a:r>
               <a:rPr lang="en-GB" sz="2400" dirty="0"/>
-              <a:t>70125</a:t>
+              <a:t>70 125</a:t>
             </a:r>
             <a:r>
               <a:rPr lang="ky-KG" sz="2400" dirty="0"/>
@@ -5600,7 +5600,7 @@
             <a:pPr algn="ctr"/>
             <a:r>
               <a:rPr lang="en-GB" sz="2000" dirty="0"/>
-              <a:t>70125 – 976</a:t>
+              <a:t>70 125 – 976</a:t>
             </a:r>
             <a:r>
               <a:rPr lang="ky-KG" sz="2000" dirty="0"/>
@@ -5657,7 +5657,7 @@
             <a:pPr algn="ctr"/>
             <a:r>
               <a:rPr lang="ky-KG" sz="2000" dirty="0"/>
-              <a:t>70923</a:t>
+              <a:t>70 923</a:t>
             </a:r>
             <a:r>
               <a:rPr lang="en-GB" sz="2000" dirty="0"/>
@@ -5759,7 +5759,7 @@
             </a:r>
             <a:r>
               <a:rPr lang="ky-KG" sz="2000" dirty="0"/>
-              <a:t> 70923 сом төлөнүшү керек</a:t>
+              <a:t> 70 923 сом төлөнүшү керек</a:t>
             </a:r>
             <a:endParaRPr lang="en-GB" sz="2000" dirty="0"/>
           </a:p>
@@ -7103,7 +7103,7 @@
             <a:pPr algn="ctr"/>
             <a:r>
               <a:rPr lang="en-GB" sz="2000" dirty="0"/>
-              <a:t>3550</a:t>
+              <a:t>35 50</a:t>
             </a:r>
             <a:r>
               <a:rPr lang="ky-KG" sz="2000" dirty="0"/>
@@ -7494,7 +7494,7 @@
             <a:pPr algn="ctr"/>
             <a:r>
               <a:rPr lang="en-GB" sz="2000" dirty="0"/>
-              <a:t>110</a:t>
+              <a:t>11 0</a:t>
             </a:r>
             <a:r>
               <a:rPr lang="ky-KG" sz="2000" dirty="0"/>
@@ -7722,11 +7722,11 @@
             <a:pPr algn="ctr"/>
             <a:r>
               <a:rPr lang="en-GB" sz="2000" dirty="0"/>
-              <a:t>55</a:t>
+              <a:t>55 599 сом</a:t>
             </a:r>
             <a:r>
               <a:rPr lang="ky-KG" sz="2000" dirty="0"/>
-              <a:t>599 сом</a:t>
+              <a:t/>
             </a:r>
             <a:endParaRPr lang="en-GB" sz="2000" dirty="0"/>
           </a:p>
@@ -7918,7 +7918,7 @@
             <a:pPr algn="ctr"/>
             <a:r>
               <a:rPr lang="ky-KG" sz="2800" dirty="0"/>
-              <a:t> Жалпы 38495сом</a:t>
+              <a:t> Жалпы 38 495сом</a:t>
             </a:r>
             <a:endParaRPr lang="en-GB" sz="2800" dirty="0"/>
           </a:p>
@@ -8000,7 +8000,7 @@
             <a:pPr algn="ctr"/>
             <a:r>
               <a:rPr lang="ky-KG" sz="2800" dirty="0"/>
-              <a:t>Жалпы 62144 сом</a:t>
+              <a:t>Жалпы 62 144 сом</a:t>
             </a:r>
             <a:endParaRPr lang="en-GB" sz="2800" dirty="0"/>
           </a:p>
@@ -8074,7 +8074,7 @@
             <a:pPr algn="ctr"/>
             <a:r>
               <a:rPr lang="ky-KG" sz="2800" dirty="0"/>
-              <a:t>Жалпы 61400 сом</a:t>
+              <a:t>Жалпы 61 400 сом</a:t>
             </a:r>
             <a:endParaRPr lang="en-GB" sz="2800" dirty="0"/>
           </a:p>
@@ -8741,7 +8741,7 @@
             <a:pPr algn="ctr"/>
             <a:r>
               <a:rPr lang="en-GB" sz="2400" dirty="0"/>
-              <a:t>11095</a:t>
+              <a:t>11 095</a:t>
             </a:r>
             <a:r>
               <a:rPr lang="ky-KG" sz="2400" dirty="0"/>
@@ -9024,7 +9024,7 @@
             </a:r>
             <a:r>
               <a:rPr lang="en-GB" sz="2000" dirty="0"/>
-              <a:t> = 11095 – 166</a:t>
+              <a:t> = 11 095 – 166</a:t>
             </a:r>
             <a:r>
               <a:rPr lang="ky-KG" sz="2000" dirty="0"/>
@@ -9906,7 +9906,7 @@
             <a:pPr algn="ctr"/>
             <a:r>
               <a:rPr lang="en-GB" sz="2400" dirty="0"/>
-              <a:t>3550</a:t>
+              <a:t>35 50</a:t>
             </a:r>
             <a:r>
               <a:rPr lang="ky-KG" sz="2400" dirty="0"/>
@@ -10189,7 +10189,7 @@
             </a:r>
             <a:r>
               <a:rPr lang="en-GB" sz="2000" dirty="0"/>
-              <a:t> = 3550</a:t>
+              <a:t> = 35 50</a:t>
             </a:r>
             <a:r>
               <a:rPr lang="ky-KG" sz="2000" dirty="0"/>
@@ -11016,11 +11016,11 @@
             <a:pPr algn="ctr"/>
             <a:r>
               <a:rPr lang="en-GB" sz="2400" dirty="0"/>
-              <a:t>95</a:t>
+              <a:t>95 500 сом </a:t>
             </a:r>
             <a:r>
               <a:rPr lang="ky-KG" sz="2400" dirty="0"/>
-              <a:t>500 сом </a:t>
+              <a:t/>
             </a:r>
             <a:endParaRPr lang="en-GB" sz="2400" dirty="0"/>
           </a:p>
@@ -11325,31 +11325,31 @@
             <a:pPr algn="ctr"/>
             <a:r>
               <a:rPr lang="ky-KG" sz="2000" dirty="0"/>
-              <a:t>Насыя</a:t>
+              <a:t>Насыя = 95 500  – 5550  = 89 950  </a:t>
             </a:r>
             <a:r>
               <a:rPr lang="en-GB" sz="2000" dirty="0"/>
-              <a:t> = 95</a:t>
+              <a:t/>
             </a:r>
             <a:r>
               <a:rPr lang="ky-KG" sz="2000" dirty="0"/>
-              <a:t>500 </a:t>
+              <a:t/>
             </a:r>
             <a:r>
               <a:rPr lang="en-GB" sz="2000" dirty="0"/>
-              <a:t> – 55</a:t>
+              <a:t/>
             </a:r>
             <a:r>
               <a:rPr lang="ky-KG" sz="2000" dirty="0"/>
-              <a:t>50 </a:t>
+              <a:t/>
             </a:r>
             <a:r>
               <a:rPr lang="en-GB" sz="2000" dirty="0"/>
-              <a:t> = 89 950 </a:t>
+              <a:t/>
             </a:r>
             <a:r>
               <a:rPr lang="ky-KG" sz="2000" dirty="0"/>
-              <a:t> </a:t>
+              <a:t/>
             </a:r>
             <a:endParaRPr lang="en-GB" sz="2000" dirty="0"/>
           </a:p>
@@ -12445,7 +12445,7 @@
             <a:pPr algn="ctr"/>
             <a:r>
               <a:rPr lang="en-GB" sz="2000" dirty="0"/>
-              <a:t>1220</a:t>
+              <a:t>12 20</a:t>
             </a:r>
             <a:r>
               <a:rPr lang="ky-KG" sz="2000" dirty="0"/>
@@ -12788,7 +12788,7 @@
             <a:pPr algn="ctr"/>
             <a:r>
               <a:rPr lang="en-GB" sz="2000" dirty="0"/>
-              <a:t>64356</a:t>
+              <a:t>64 356</a:t>
             </a:r>
             <a:r>
               <a:rPr lang="ky-KG" sz="2000" dirty="0"/>
@@ -13228,7 +13228,7 @@
             <a:pPr algn="ctr"/>
             <a:r>
               <a:rPr lang="en-GB" sz="2000" dirty="0"/>
-              <a:t>44272</a:t>
+              <a:t>44 272</a:t>
             </a:r>
             <a:r>
               <a:rPr lang="ky-KG" sz="2000" dirty="0"/>
@@ -13571,7 +13571,7 @@
             <a:pPr algn="ctr"/>
             <a:r>
               <a:rPr lang="en-GB" sz="2000" dirty="0"/>
-              <a:t>60916</a:t>
+              <a:t>60 916</a:t>
             </a:r>
             <a:r>
               <a:rPr lang="ky-KG" sz="2000" dirty="0"/>
@@ -13842,7 +13842,7 @@
             <a:pPr algn="ctr"/>
             <a:r>
               <a:rPr lang="en-GB" sz="2000" dirty="0"/>
-              <a:t>59917</a:t>
+              <a:t>59 917</a:t>
             </a:r>
             <a:r>
               <a:rPr lang="ky-KG" sz="2000" dirty="0"/>
@@ -13939,7 +13939,7 @@
             <a:pPr algn="ctr"/>
             <a:r>
               <a:rPr lang="en-GB" sz="2000" dirty="0"/>
-              <a:t>40389</a:t>
+              <a:t>40 389</a:t>
             </a:r>
             <a:r>
               <a:rPr lang="ky-KG" sz="2000" dirty="0"/>
@@ -14043,7 +14043,7 @@
             <a:pPr algn="ctr"/>
             <a:r>
               <a:rPr lang="en-GB" sz="2000" dirty="0"/>
-              <a:t>56478</a:t>
+              <a:t>56 478</a:t>
             </a:r>
             <a:r>
               <a:rPr lang="ky-KG" sz="2000" dirty="0"/>
@@ -14972,7 +14972,7 @@
             <a:pPr algn="ctr"/>
             <a:r>
               <a:rPr lang="ky-KG" sz="2000" dirty="0"/>
-              <a:t>22080 сом бир жолку төлөм</a:t>
+              <a:t>22 080 сом бир жолку төлөм</a:t>
             </a:r>
             <a:endParaRPr lang="en-GB" sz="2000" dirty="0"/>
           </a:p>
@@ -15220,7 +15220,7 @@
             <a:pPr algn="ctr"/>
             <a:r>
               <a:rPr lang="ky-KG" sz="2400" dirty="0"/>
-              <a:t>22080 сом</a:t>
+              <a:t>22 080 сом</a:t>
             </a:r>
             <a:endParaRPr lang="en-GB" sz="2400" dirty="0"/>
           </a:p>
@@ -15771,7 +15771,7 @@
             <a:pPr algn="ctr"/>
             <a:r>
               <a:rPr lang="ky-KG" sz="2000" dirty="0"/>
-              <a:t>38835 сом бир жолку төлөм</a:t>
+              <a:t>38 835 сом бир жолку төлөм</a:t>
             </a:r>
             <a:endParaRPr lang="en-GB" sz="2000" dirty="0"/>
           </a:p>
@@ -16019,7 +16019,7 @@
             <a:pPr algn="ctr"/>
             <a:r>
               <a:rPr lang="ky-KG" sz="2400" dirty="0"/>
-              <a:t>38835 сом</a:t>
+              <a:t>38 835 сом</a:t>
             </a:r>
             <a:endParaRPr lang="en-GB" sz="2400" dirty="0"/>
           </a:p>
@@ -16695,7 +16695,7 @@
             <a:pPr algn="ctr"/>
             <a:r>
               <a:rPr lang="ky-KG" sz="2000" dirty="0"/>
-              <a:t>24965 сом бир жолку төлөм</a:t>
+              <a:t>24 965 сом бир жолку төлөм</a:t>
             </a:r>
             <a:endParaRPr lang="en-GB" sz="2000" dirty="0"/>
           </a:p>
@@ -18145,7 +18145,7 @@
             <a:pPr algn="ctr"/>
             <a:r>
               <a:rPr lang="ky-KG" sz="2000" dirty="0"/>
-              <a:t>24965 сом</a:t>
+              <a:t>24 965 сом</a:t>
             </a:r>
             <a:endParaRPr lang="en-GB" sz="2000" dirty="0"/>
           </a:p>
@@ -18186,7 +18186,7 @@
             </a:r>
             <a:r>
               <a:rPr lang="ky-KG" sz="2000" dirty="0"/>
-              <a:t>29443</a:t>
+              <a:t>29 443</a:t>
             </a:r>
             <a:endParaRPr lang="en-GB" sz="2000" dirty="0"/>
           </a:p>
@@ -19980,7 +19980,7 @@
             <a:pPr algn="ctr"/>
             <a:r>
               <a:rPr lang="ky-KG" sz="2000" dirty="0"/>
-              <a:t>50930 сомбир жолку төлөм</a:t>
+              <a:t>50 930 сомбир жолку төлөм</a:t>
             </a:r>
             <a:endParaRPr lang="en-GB" sz="2000" dirty="0"/>
           </a:p>
@@ -20017,7 +20017,7 @@
             <a:pPr algn="ctr"/>
             <a:r>
               <a:rPr lang="ky-KG" sz="2000" dirty="0"/>
-              <a:t>Азыр болгону 10999 төлөп, </a:t>
+              <a:t>Азыр болгону 10 999 төлөп, </a:t>
             </a:r>
           </a:p>
           <a:p>
@@ -22051,7 +22051,7 @@
             <a:pPr algn="ctr"/>
             <a:r>
               <a:rPr lang="ky-KG" sz="2000" dirty="0"/>
-              <a:t>50930</a:t>
+              <a:t>50 930</a:t>
             </a:r>
             <a:endParaRPr lang="en-GB" sz="2000" dirty="0"/>
           </a:p>
@@ -22088,7 +22088,7 @@
             <a:pPr algn="ctr"/>
             <a:r>
               <a:rPr lang="ky-KG" sz="2000" dirty="0"/>
-              <a:t>10999</a:t>
+              <a:t>10 999</a:t>
             </a:r>
             <a:endParaRPr lang="en-GB" sz="2000" dirty="0"/>
           </a:p>
@@ -23834,7 +23834,7 @@
             <a:pPr algn="ctr"/>
             <a:r>
               <a:rPr lang="ru-RU" sz="2000" dirty="0"/>
-              <a:t>Духовканын баасы 61000 сом </a:t>
+              <a:t>Духовканын баасы 61 000 сом </a:t>
             </a:r>
           </a:p>
           <a:p>
@@ -23878,7 +23878,7 @@
             <a:pPr algn="ctr"/>
             <a:r>
               <a:rPr lang="ru-RU" sz="2000" dirty="0"/>
-              <a:t>Бирок, Хүррем аны 13315 сом депозит жана </a:t>
+              <a:t>Бирок, Хүррем аны 13 315 сом депозит жана </a:t>
             </a:r>
           </a:p>
           <a:p>
@@ -23966,7 +23966,7 @@
             <a:pPr algn="ctr"/>
             <a:r>
               <a:rPr lang="ru-RU" sz="2000" dirty="0"/>
-              <a:t>13315</a:t>
+              <a:t>13 315</a:t>
             </a:r>
             <a:r>
               <a:rPr lang="en-GB" sz="2000" dirty="0"/>
@@ -24081,7 +24081,7 @@
             <a:pPr algn="ctr"/>
             <a:r>
               <a:rPr lang="ky-KG" sz="2000" dirty="0"/>
-              <a:t>жалпысынан 216400 сом төлөйт.</a:t>
+              <a:t>жалпысынан 216 400 сом төлөйт.</a:t>
             </a:r>
             <a:endParaRPr lang="en-GB" sz="2000" dirty="0"/>
           </a:p>
@@ -24216,7 +24216,7 @@
             </a:r>
             <a:r>
               <a:rPr lang="ru-RU" sz="2000" dirty="0"/>
-              <a:t>61000 сом </a:t>
+              <a:t>61 000 сом </a:t>
             </a:r>
             <a:r>
               <a:rPr lang="en-GB" sz="2000" dirty="0"/>
@@ -24261,7 +24261,7 @@
             <a:pPr algn="ctr"/>
             <a:r>
               <a:rPr lang="ky-KG" sz="2000" dirty="0"/>
-              <a:t>216400 сом </a:t>
+              <a:t>216 400 сом </a:t>
             </a:r>
             <a:r>
               <a:rPr lang="en-GB" sz="2000" dirty="0"/>
@@ -25021,7 +25021,7 @@
             <a:pPr algn="ctr"/>
             <a:r>
               <a:rPr lang="ky-KG" sz="2400" dirty="0"/>
-              <a:t>40000 сом</a:t>
+              <a:t>40 000 сом</a:t>
             </a:r>
             <a:endParaRPr lang="en-GB" sz="2400" dirty="0"/>
           </a:p>
@@ -25231,7 +25231,7 @@
             <a:pPr algn="ctr"/>
             <a:r>
               <a:rPr lang="ky-KG" sz="2000" dirty="0"/>
-              <a:t>40000</a:t>
+              <a:t>40 000</a:t>
             </a:r>
             <a:r>
               <a:rPr lang="en-GB" sz="2000" dirty="0"/>
@@ -25737,7 +25737,7 @@
             <a:pPr algn="ctr"/>
             <a:r>
               <a:rPr lang="en-GB" sz="2400" dirty="0"/>
-              <a:t>48821</a:t>
+              <a:t>48 821</a:t>
             </a:r>
             <a:r>
               <a:rPr lang="ky-KG" sz="2400" dirty="0"/>
@@ -25996,7 +25996,7 @@
             <a:pPr algn="ctr"/>
             <a:r>
               <a:rPr lang="en-GB" sz="2000" dirty="0"/>
-              <a:t>48821 – 99</a:t>
+              <a:t>48 821 – 99</a:t>
             </a:r>
             <a:r>
               <a:rPr lang="ky-KG" sz="2000" dirty="0"/>
@@ -26120,7 +26120,7 @@
             </a:r>
             <a:r>
               <a:rPr lang="en-GB" sz="2000" dirty="0"/>
-              <a:t>48821</a:t>
+              <a:t>48 821</a:t>
             </a:r>
             <a:r>
               <a:rPr lang="ky-KG" sz="2000" dirty="0"/>
@@ -26605,7 +26605,7 @@
             <a:pPr algn="ctr"/>
             <a:r>
               <a:rPr lang="en-GB" sz="2400" dirty="0"/>
-              <a:t>56589</a:t>
+              <a:t>56 589</a:t>
             </a:r>
             <a:r>
               <a:rPr lang="ky-KG" sz="2400" dirty="0"/>
@@ -26823,7 +26823,7 @@
             <a:pPr algn="ctr"/>
             <a:r>
               <a:rPr lang="en-GB" sz="2000" dirty="0"/>
-              <a:t>56589 – 8876</a:t>
+              <a:t>56 589 – 8876</a:t>
             </a:r>
             <a:r>
               <a:rPr lang="ky-KG" sz="2000" dirty="0"/>
